--- a/docs/교재/실전반_오프라인/09회차/실전반_오프라인_09회차.pptx
+++ b/docs/교재/실전반_오프라인/09회차/실전반_오프라인_09회차.pptx
@@ -3145,7 +3145,7 @@
           <a:lstStyle/>
           <a:p>
             <a:r>
-              <a:t>누가 무엇을 맡는지, 책임의 경계를 묻는 문항입니다. 에이전트가 맡은 일과 사람이 맡은 일이 무엇이었는지, 그리고 효과를 내는 작업을 어디에 두었는지를 떠올려 보시기 바랍니다.</a:t>
+              <a:t>누가 무엇을 맡는지, 책임의 경계를 묻는 문항입니다. 에이전트가 맡은 일과 사람이 맡은 일이 무엇이었는지, 그리고 업무 시스템을 바꾸는 작업을 어디에 두었는지를 떠올려 보시기 바랍니다.</a:t>
             </a:r>
           </a:p>
         </p:txBody>
@@ -3285,7 +3285,7 @@
           <a:lstStyle/>
           <a:p>
             <a:r>
-              <a:t>정답보다 판단 기준이 중요합니다. 첫 문항의 1번은 처리 건의 종결과 업무 원인의 해결을 혼동한 것입니다. 둘째 문항의 4번은 사람이 결정하지 않은 채 효과가 나가게 하는 설계입니다. 셋째 문항의 2번은 스킬에 적은 순서를 엔진이 지키는 순서와 혼동한 것입니다.</a:t>
+              <a:t>정답보다 판단 기준이 중요합니다. 첫 문항의 1번은 처리 건의 종결과 업무 원인의 해결을 혼동한 것입니다. 둘째 문항의 4번은 사람이 결정하지 않은 채 정비 오더가 등록되게 하는 설계입니다. 셋째 문항의 2번은 스킬에 적은 순서를 엔진이 지키는 순서와 혼동한 것입니다.</a:t>
             </a:r>
           </a:p>
         </p:txBody>
@@ -9543,7 +9543,7 @@
       </p:sp>
       <p:pic>
         <p:nvPicPr>
-          <p:cNvPr id="6" name="삽화:세흐름_나란히.svg" descr="illust_4812764539059103311_1791743711.png"/>
+          <p:cNvPr id="6" name="삽화:세흐름_나란히.svg" descr="illust_1216185357756983426_1791743711.png"/>
           <p:cNvPicPr>
             <a:picLocks noChangeAspect="1"/>
           </p:cNvPicPr>
@@ -11029,7 +11029,7 @@
       </p:sp>
       <p:pic>
         <p:nvPicPr>
-          <p:cNvPr id="6" name="삽화:승인블록_자리.svg" descr="illust_7531941469032207008_1791743711.png"/>
+          <p:cNvPr id="6" name="삽화:승인블록_자리.svg" descr="illust_9005289263999402806_1791743711.png"/>
           <p:cNvPicPr>
             <a:picLocks noChangeAspect="1"/>
           </p:cNvPicPr>
@@ -11960,7 +11960,7 @@
       </p:sp>
       <p:pic>
         <p:nvPicPr>
-          <p:cNvPr id="6" name="삽화:흐름_정기점검.svg" descr="illust_8929814907899167744_1791743711.png"/>
+          <p:cNvPr id="6" name="삽화:흐름_정기점검.svg" descr="illust_5031971657171957654_1791743711.png"/>
           <p:cNvPicPr>
             <a:picLocks noChangeAspect="1"/>
           </p:cNvPicPr>
@@ -12849,7 +12849,7 @@
       </p:sp>
       <p:pic>
         <p:nvPicPr>
-          <p:cNvPr id="6" name="삽화:흐름_재고보충.svg" descr="illust_5869020567939041013_1791743711.png"/>
+          <p:cNvPr id="6" name="삽화:흐름_재고보충.svg" descr="illust_5268527476723182244_1791743711.png"/>
           <p:cNvPicPr>
             <a:picLocks noChangeAspect="1"/>
           </p:cNvPicPr>
@@ -22981,7 +22981,7 @@
       </p:sp>
       <p:pic>
         <p:nvPicPr>
-          <p:cNvPr id="6" name="삽화:요소_복습.svg" descr="illust_6564635237358978627_1791743711.png"/>
+          <p:cNvPr id="6" name="삽화:요소_복습.svg" descr="illust_5859327636322397687_1791743711.png"/>
           <p:cNvPicPr>
             <a:picLocks noChangeAspect="1"/>
           </p:cNvPicPr>
@@ -24973,7 +24973,7 @@
       </p:sp>
       <p:pic>
         <p:nvPicPr>
-          <p:cNvPr id="6" name="삽화:다섯자리.svg" descr="illust_6183873675504199375_1791743711.png"/>
+          <p:cNvPr id="6" name="삽화:다섯자리.svg" descr="illust_6064319680261960415_1791743711.png"/>
           <p:cNvPicPr>
             <a:picLocks noChangeAspect="1"/>
           </p:cNvPicPr>
@@ -25547,7 +25547,7 @@
       </p:sp>
       <p:pic>
         <p:nvPicPr>
-          <p:cNvPr id="6" name="삽화:주고받는것.svg" descr="illust_3867009818608433961_1791743711.png"/>
+          <p:cNvPr id="6" name="삽화:주고받는것.svg" descr="illust_6525185738823349449_1791743711.png"/>
           <p:cNvPicPr>
             <a:picLocks noChangeAspect="1"/>
           </p:cNvPicPr>
@@ -27469,7 +27469,7 @@
       </p:sp>
       <p:pic>
         <p:nvPicPr>
-          <p:cNvPr id="6" name="삽화:세종료.svg" descr="illust_1019199866157769552_1791743711.png"/>
+          <p:cNvPr id="6" name="삽화:세종료.svg" descr="illust_7757677133858213709_1791743711.png"/>
           <p:cNvPicPr>
             <a:picLocks noChangeAspect="1"/>
           </p:cNvPicPr>
@@ -29626,7 +29626,7 @@
       </p:sp>
       <p:pic>
         <p:nvPicPr>
-          <p:cNvPr id="6" name="삽화:세층연결.svg" descr="illust_2589228028581167421_1791743711.png"/>
+          <p:cNvPr id="6" name="삽화:세층연결.svg" descr="illust_9089923570106823244_1791743711.png"/>
           <p:cNvPicPr>
             <a:picLocks noChangeAspect="1"/>
           </p:cNvPicPr>
@@ -36502,7 +36502,7 @@
                 <a:ea typeface="맑은 고딕"/>
                 <a:cs typeface="맑은 고딕"/>
               </a:rPr>
-              <a:t>• mes_orders, qms_lots</a:t>
+              <a:t>• mes_orders</a:t>
             </a:r>
           </a:p>
           <a:p>
@@ -41856,7 +41856,7 @@
       </p:sp>
       <p:pic>
         <p:nvPicPr>
-          <p:cNvPr id="6" name="삽화:세시작.svg" descr="illust_6912126248234607761_1791743711.png"/>
+          <p:cNvPr id="6" name="삽화:세시작.svg" descr="illust_5646356840452959193_1791743711.png"/>
           <p:cNvPicPr>
             <a:picLocks noChangeAspect="1"/>
           </p:cNvPicPr>
@@ -43810,7 +43810,7 @@
                 <a:ea typeface="맑은 고딕"/>
                 <a:cs typeface="맑은 고딕"/>
               </a:rPr>
-              <a:t>설비를 세우는 정비 오더는 효과를 내는 작업이므로 설비보전팀장의 승인 뒤에 둔다</a:t>
+              <a:t>정비 오더의 등록은 업무 시스템을 바꾸는 작업이므로 설비보전팀장의 승인 뒤에 둔다</a:t>
             </a:r>
           </a:p>
         </p:txBody>
@@ -45319,7 +45319,7 @@
                 <a:ea typeface="맑은 고딕"/>
                 <a:cs typeface="맑은 고딕"/>
               </a:rPr>
-              <a:t>에이전트는 제안까지 한다. 효과를 내는 작업은 책임질 역할의 승인 뒤에 둔다.</a:t>
+              <a:t>에이전트는 제안까지 한다. 업무 시스템을 바꾸는 작업은 책임질 역할의 승인 뒤에 둔다.</a:t>
             </a:r>
           </a:p>
         </p:txBody>
@@ -47340,7 +47340,7 @@
       </p:sp>
       <p:pic>
         <p:nvPicPr>
-          <p:cNvPr id="6" name="삽화:운전시간.svg" descr="illust_72902703348028194_1791743711.png"/>
+          <p:cNvPr id="6" name="삽화:운전시간.svg" descr="illust_1587195722536395227_1791743711.png"/>
           <p:cNvPicPr>
             <a:picLocks noChangeAspect="1"/>
           </p:cNvPicPr>
@@ -47851,7 +47851,7 @@
       </p:sp>
       <p:pic>
         <p:nvPicPr>
-          <p:cNvPr id="6" name="삽화:재고.svg" descr="illust_6973628952467411529_1791743711.png"/>
+          <p:cNvPr id="6" name="삽화:재고.svg" descr="illust_5502439894950300863_1791743711.png"/>
           <p:cNvPicPr>
             <a:picLocks noChangeAspect="1"/>
           </p:cNvPicPr>

--- a/docs/교재/실전반_오프라인/09회차/실전반_오프라인_09회차.pptx
+++ b/docs/교재/실전반_오프라인/09회차/실전반_오프라인_09회차.pptx
@@ -2515,7 +2515,7 @@
           <a:lstStyle/>
           <a:p>
             <a:r>
-              <a:t>순서를 적은 문서가 둘 있었습니다. 스킬은 에이전트가 읽는 지침으로, 한 단계 안에서 어느 도구를 어떤 순서로 부를지를 적습니다. 프로세스 정의는 엔진이 읽는 설계도로, 단계와 단계 사이의 순서를 정합니다. 스킬에 승인을 받으라고 적어도 승인이 보장되지는 않습니다. 단계 사이의 순서는 엔진이 지키기 때문에 승인 없이는 명령으로 넘어가지 않습니다.</a:t>
+              <a:t>순서를 적은 문서가 둘 있었습니다. 스킬은 에이전트가 읽는 지침으로 한 단계 안에서 어느 도구를 어떤 순서로 부를지를 적으며, 왼쪽에 적은 것은 이 처리 건의 실행 기록에 남은 호출 순서입니다. 프로세스 정의는 엔진이 읽는 설계도로, 단계와 단계 사이의 순서를 정합니다. 스킬에 승인을 받으라고 적어도 승인이 보장되지는 않습니다. 단계 사이의 순서는 엔진이 지키기 때문에 승인 없이는 명령으로 넘어가지 않습니다.</a:t>
             </a:r>
           </a:p>
         </p:txBody>
@@ -3635,7 +3635,7 @@
           <a:lstStyle/>
           <a:p>
             <a:r>
-              <a:t>달라지는 네 가지를 보았으니 이제 같은 것을 보겠습니다. 위에서부터 긴급 대응, 정기 점검, 재고 보충의 뼈대입니다. 세 줄 모두 경보로 시작해 에이전트가 제안하고, 사람이 승인하거나 거절하고, 시스템이 처리한 뒤 결과를 보고합니다. 하늘색 띠 안의 승인 작업과 갈림은 세 줄이 같은 자리, 같은 모양입니다. 달라지는 것은 띠의 오른쪽에 이어지는 시스템 작업의 수와 내용입니다.</a:t>
+              <a:t>달라지는 네 가지를 보았으니 이제 같은 것을 보겠습니다. 위에서부터 긴급 대응, 정기 점검, 재고 보충의 뼈대입니다. 세 줄 모두 경보로 시작해 에이전트가 제안하고, 사람이 승인하거나 거절하고, 시스템이 처리한 뒤 결과를 보고합니다. 하늘색 띠 안의 승인 작업과 갈림은 세 줄이 같은 자리, 같은 모양이어서 같은 승인 블록이라고 적었습니다. 달라지는 것은 띠의 오른쪽에 이어지는 시스템 작업의 수와 내용입니다.</a:t>
             </a:r>
           </a:p>
         </p:txBody>
@@ -9543,7 +9543,7 @@
       </p:sp>
       <p:pic>
         <p:nvPicPr>
-          <p:cNvPr id="6" name="삽화:세흐름_나란히.svg" descr="illust_1216185357756983426_1791743711.png"/>
+          <p:cNvPr id="6" name="삽화:세흐름_나란히.svg" descr="illust_3200548118550048397_1791743711.png"/>
           <p:cNvPicPr>
             <a:picLocks noChangeAspect="1"/>
           </p:cNvPicPr>
@@ -11029,7 +11029,7 @@
       </p:sp>
       <p:pic>
         <p:nvPicPr>
-          <p:cNvPr id="6" name="삽화:승인블록_자리.svg" descr="illust_9005289263999402806_1791743711.png"/>
+          <p:cNvPr id="6" name="삽화:승인블록_자리.svg" descr="illust_1230983329470362823_1791743711.png"/>
           <p:cNvPicPr>
             <a:picLocks noChangeAspect="1"/>
           </p:cNvPicPr>
@@ -11960,7 +11960,7 @@
       </p:sp>
       <p:pic>
         <p:nvPicPr>
-          <p:cNvPr id="6" name="삽화:흐름_정기점검.svg" descr="illust_5031971657171957654_1791743711.png"/>
+          <p:cNvPr id="6" name="삽화:흐름_정기점검.svg" descr="illust_3102961632587978335_1791743711.png"/>
           <p:cNvPicPr>
             <a:picLocks noChangeAspect="1"/>
           </p:cNvPicPr>
@@ -12849,7 +12849,7 @@
       </p:sp>
       <p:pic>
         <p:nvPicPr>
-          <p:cNvPr id="6" name="삽화:흐름_재고보충.svg" descr="illust_5268527476723182244_1791743711.png"/>
+          <p:cNvPr id="6" name="삽화:흐름_재고보충.svg" descr="illust_2163492202780176559_1791743711.png"/>
           <p:cNvPicPr>
             <a:picLocks noChangeAspect="1"/>
           </p:cNvPicPr>
@@ -22981,7 +22981,7 @@
       </p:sp>
       <p:pic>
         <p:nvPicPr>
-          <p:cNvPr id="6" name="삽화:요소_복습.svg" descr="illust_5859327636322397687_1791743711.png"/>
+          <p:cNvPr id="6" name="삽화:요소_복습.svg" descr="illust_1497987964125887775_1791743711.png"/>
           <p:cNvPicPr>
             <a:picLocks noChangeAspect="1"/>
           </p:cNvPicPr>
@@ -24973,7 +24973,7 @@
       </p:sp>
       <p:pic>
         <p:nvPicPr>
-          <p:cNvPr id="6" name="삽화:다섯자리.svg" descr="illust_6064319680261960415_1791743711.png"/>
+          <p:cNvPr id="6" name="삽화:다섯자리.svg" descr="illust_1620453784050136660_1791743711.png"/>
           <p:cNvPicPr>
             <a:picLocks noChangeAspect="1"/>
           </p:cNvPicPr>
@@ -25547,7 +25547,7 @@
       </p:sp>
       <p:pic>
         <p:nvPicPr>
-          <p:cNvPr id="6" name="삽화:주고받는것.svg" descr="illust_6525185738823349449_1791743711.png"/>
+          <p:cNvPr id="6" name="삽화:주고받는것.svg" descr="illust_286936781265026052_1791743711.png"/>
           <p:cNvPicPr>
             <a:picLocks noChangeAspect="1"/>
           </p:cNvPicPr>
@@ -27469,7 +27469,7 @@
       </p:sp>
       <p:pic>
         <p:nvPicPr>
-          <p:cNvPr id="6" name="삽화:세종료.svg" descr="illust_7757677133858213709_1791743711.png"/>
+          <p:cNvPr id="6" name="삽화:세종료.svg" descr="illust_8017949538807317734_1791743711.png"/>
           <p:cNvPicPr>
             <a:picLocks noChangeAspect="1"/>
           </p:cNvPicPr>
@@ -29626,7 +29626,7 @@
       </p:sp>
       <p:pic>
         <p:nvPicPr>
-          <p:cNvPr id="6" name="삽화:세층연결.svg" descr="illust_9089923570106823244_1791743711.png"/>
+          <p:cNvPr id="6" name="삽화:세층연결.svg" descr="illust_2523091343730621568_1791743711.png"/>
           <p:cNvPicPr>
             <a:picLocks noChangeAspect="1"/>
           </p:cNvPicPr>
@@ -31334,7 +31334,7 @@
                 <a:ea typeface="맑은 고딕"/>
                 <a:cs typeface="맑은 고딕"/>
               </a:rPr>
-              <a:t>쿨러 핀 오염으로 가려</a:t>
+              <a:t>쿨러 핀 오염으로</a:t>
             </a:r>
           </a:p>
           <a:p>
@@ -31355,7 +31355,7 @@
                 <a:ea typeface="맑은 고딕"/>
                 <a:cs typeface="맑은 고딕"/>
               </a:rPr>
-              <a:t>이 조치를 추천한다</a:t>
+              <a:t>가려 추천한다</a:t>
             </a:r>
           </a:p>
         </p:txBody>
@@ -31728,7 +31728,7 @@
                 <a:ea typeface="맑은 고딕"/>
                 <a:cs typeface="맑은 고딕"/>
               </a:rPr>
-              <a:t>팬 속도 100 % 명령</a:t>
+              <a:t>프로세스가</a:t>
             </a:r>
           </a:p>
           <a:p>
@@ -31749,7 +31749,28 @@
                 <a:ea typeface="맑은 고딕"/>
                 <a:cs typeface="맑은 고딕"/>
               </a:rPr>
-              <a:t>CMD-1010-0001-01d1</a:t>
+              <a:t>팬 속도 100 %</a:t>
+            </a:r>
+          </a:p>
+          <a:p>
+            <a:pPr algn="ctr">
+              <a:lnSpc>
+                <a:spcPct val="110000"/>
+              </a:lnSpc>
+              <a:spcAft>
+                <a:spcPts val="400"/>
+              </a:spcAft>
+            </a:pPr>
+            <a:r>
+              <a:rPr sz="1250" b="0">
+                <a:solidFill>
+                  <a:srgbClr val="1F2A3A"/>
+                </a:solidFill>
+                <a:latin typeface="맑은 고딕"/>
+                <a:ea typeface="맑은 고딕"/>
+                <a:cs typeface="맑은 고딕"/>
+              </a:rPr>
+              <a:t>명령을 낸다</a:t>
             </a:r>
           </a:p>
         </p:txBody>
@@ -35706,7 +35727,7 @@
                 <a:ea typeface="맑은 고딕"/>
                 <a:cs typeface="맑은 고딕"/>
               </a:rPr>
-              <a:t>• 에이전트가 읽고 따른다</a:t>
+              <a:t>• 이 처리 건의 호출이며 상황에 따라 달라진다</a:t>
             </a:r>
           </a:p>
           <a:p>
@@ -35727,7 +35748,7 @@
                 <a:ea typeface="맑은 고딕"/>
                 <a:cs typeface="맑은 고딕"/>
               </a:rPr>
-              <a:t>• 상황에 따라 호출이 달라질 수 있다</a:t>
+              <a:t>• 에이전트가 읽고 따른다</a:t>
             </a:r>
           </a:p>
         </p:txBody>
@@ -37125,8 +37146,8 @@
         </p:nvSpPr>
         <p:spPr>
           <a:xfrm>
-            <a:off x="548640" y="2511552"/>
-            <a:ext cx="3515258" cy="2959607"/>
+            <a:off x="548640" y="2620010"/>
+            <a:ext cx="3515258" cy="2742692"/>
           </a:xfrm>
           <a:prstGeom prst="roundRect">
             <a:avLst>
@@ -37158,7 +37179,7 @@
         </p:nvSpPr>
         <p:spPr>
           <a:xfrm>
-            <a:off x="777240" y="2712720"/>
+            <a:off x="777240" y="2821178"/>
             <a:ext cx="731520" cy="731520"/>
           </a:xfrm>
           <a:prstGeom prst="ellipse">
@@ -37195,7 +37216,7 @@
         </p:blipFill>
         <p:spPr>
           <a:xfrm>
-            <a:off x="930859" y="2866339"/>
+            <a:off x="930859" y="2974797"/>
             <a:ext cx="424281" cy="424281"/>
           </a:xfrm>
           <a:prstGeom prst="rect">
@@ -37211,8 +37232,8 @@
         </p:nvSpPr>
         <p:spPr>
           <a:xfrm>
-            <a:off x="713232" y="3535680"/>
-            <a:ext cx="3186074" cy="1432559"/>
+            <a:off x="713232" y="3644138"/>
+            <a:ext cx="3186074" cy="1215644"/>
           </a:xfrm>
           <a:prstGeom prst="rect">
             <a:avLst/>
@@ -37261,49 +37282,7 @@
                 <a:ea typeface="맑은 고딕"/>
                 <a:cs typeface="맑은 고딕"/>
               </a:rPr>
-              <a:t>• 설비 명령 앞의 경로에</a:t>
-            </a:r>
-          </a:p>
-          <a:p>
-            <a:pPr algn="l">
-              <a:lnSpc>
-                <a:spcPct val="110000"/>
-              </a:lnSpc>
-              <a:spcAft>
-                <a:spcPts val="400"/>
-              </a:spcAft>
-            </a:pPr>
-            <a:r>
-              <a:rPr sz="1400" b="0">
-                <a:solidFill>
-                  <a:srgbClr val="1F2A3A"/>
-                </a:solidFill>
-                <a:latin typeface="맑은 고딕"/>
-                <a:ea typeface="맑은 고딕"/>
-                <a:cs typeface="맑은 고딕"/>
-              </a:rPr>
-              <a:t>• 사람의 승인이 없으면</a:t>
-            </a:r>
-          </a:p>
-          <a:p>
-            <a:pPr algn="l">
-              <a:lnSpc>
-                <a:spcPct val="110000"/>
-              </a:lnSpc>
-              <a:spcAft>
-                <a:spcPts val="400"/>
-              </a:spcAft>
-            </a:pPr>
-            <a:r>
-              <a:rPr sz="1400" b="0">
-                <a:solidFill>
-                  <a:srgbClr val="1F2A3A"/>
-                </a:solidFill>
-                <a:latin typeface="맑은 고딕"/>
-                <a:ea typeface="맑은 고딕"/>
-                <a:cs typeface="맑은 고딕"/>
-              </a:rPr>
-              <a:t>• 등록하지 않는다</a:t>
+              <a:t>설비 명령 앞의 경로에 사람의 승인이 없으면 등록하지 않는다</a:t>
             </a:r>
           </a:p>
         </p:txBody>
@@ -37316,7 +37295,7 @@
         </p:nvSpPr>
         <p:spPr>
           <a:xfrm>
-            <a:off x="777240" y="5041392"/>
+            <a:off x="777240" y="4932934"/>
             <a:ext cx="1371600" cy="292608"/>
           </a:xfrm>
           <a:prstGeom prst="roundRect">
@@ -37347,7 +37326,7 @@
         </p:nvSpPr>
         <p:spPr>
           <a:xfrm>
-            <a:off x="777240" y="5041392"/>
+            <a:off x="777240" y="4932934"/>
             <a:ext cx="1371600" cy="292608"/>
           </a:xfrm>
           <a:prstGeom prst="rect">
@@ -37386,8 +37365,8 @@
         </p:nvSpPr>
         <p:spPr>
           <a:xfrm>
-            <a:off x="4338218" y="2511552"/>
-            <a:ext cx="3515258" cy="2959607"/>
+            <a:off x="4338218" y="2620010"/>
+            <a:ext cx="3515258" cy="2742692"/>
           </a:xfrm>
           <a:prstGeom prst="roundRect">
             <a:avLst>
@@ -37419,7 +37398,7 @@
         </p:nvSpPr>
         <p:spPr>
           <a:xfrm>
-            <a:off x="4566818" y="2712720"/>
+            <a:off x="4566818" y="2821178"/>
             <a:ext cx="731520" cy="731520"/>
           </a:xfrm>
           <a:prstGeom prst="ellipse">
@@ -37456,7 +37435,7 @@
         </p:blipFill>
         <p:spPr>
           <a:xfrm>
-            <a:off x="4720437" y="2866339"/>
+            <a:off x="4720437" y="2974797"/>
             <a:ext cx="424281" cy="424281"/>
           </a:xfrm>
           <a:prstGeom prst="rect">
@@ -37472,8 +37451,8 @@
         </p:nvSpPr>
         <p:spPr>
           <a:xfrm>
-            <a:off x="4502810" y="3535680"/>
-            <a:ext cx="3186074" cy="1432559"/>
+            <a:off x="4502810" y="3644138"/>
+            <a:ext cx="3186074" cy="1215644"/>
           </a:xfrm>
           <a:prstGeom prst="rect">
             <a:avLst/>
@@ -37522,49 +37501,7 @@
                 <a:ea typeface="맑은 고딕"/>
                 <a:cs typeface="맑은 고딕"/>
               </a:rPr>
-              <a:t>• 승인 조건의 선을 지나지 않고</a:t>
-            </a:r>
-          </a:p>
-          <a:p>
-            <a:pPr algn="l">
-              <a:lnSpc>
-                <a:spcPct val="110000"/>
-              </a:lnSpc>
-              <a:spcAft>
-                <a:spcPts val="400"/>
-              </a:spcAft>
-            </a:pPr>
-            <a:r>
-              <a:rPr sz="1400" b="0">
-                <a:solidFill>
-                  <a:srgbClr val="1F2A3A"/>
-                </a:solidFill>
-                <a:latin typeface="맑은 고딕"/>
-                <a:ea typeface="맑은 고딕"/>
-                <a:cs typeface="맑은 고딕"/>
-              </a:rPr>
-              <a:t>• 실행에 닿는 경로가 있으면</a:t>
-            </a:r>
-          </a:p>
-          <a:p>
-            <a:pPr algn="l">
-              <a:lnSpc>
-                <a:spcPct val="110000"/>
-              </a:lnSpc>
-              <a:spcAft>
-                <a:spcPts val="400"/>
-              </a:spcAft>
-            </a:pPr>
-            <a:r>
-              <a:rPr sz="1400" b="0">
-                <a:solidFill>
-                  <a:srgbClr val="1F2A3A"/>
-                </a:solidFill>
-                <a:latin typeface="맑은 고딕"/>
-                <a:ea typeface="맑은 고딕"/>
-                <a:cs typeface="맑은 고딕"/>
-              </a:rPr>
-              <a:t>• 등록하지 않는다</a:t>
+              <a:t>승인 조건의 선을 지나지 않고 실행에 닿는 경로가 있으면 등록하지 않는다</a:t>
             </a:r>
           </a:p>
         </p:txBody>
@@ -37577,7 +37514,7 @@
         </p:nvSpPr>
         <p:spPr>
           <a:xfrm>
-            <a:off x="4566818" y="5041392"/>
+            <a:off x="4566818" y="4932934"/>
             <a:ext cx="1371600" cy="292608"/>
           </a:xfrm>
           <a:prstGeom prst="roundRect">
@@ -37608,7 +37545,7 @@
         </p:nvSpPr>
         <p:spPr>
           <a:xfrm>
-            <a:off x="4566818" y="5041392"/>
+            <a:off x="4566818" y="4932934"/>
             <a:ext cx="1371600" cy="292608"/>
           </a:xfrm>
           <a:prstGeom prst="rect">
@@ -37647,8 +37584,8 @@
         </p:nvSpPr>
         <p:spPr>
           <a:xfrm>
-            <a:off x="8127796" y="2511552"/>
-            <a:ext cx="3515258" cy="2959607"/>
+            <a:off x="8127796" y="2620010"/>
+            <a:ext cx="3515258" cy="2742692"/>
           </a:xfrm>
           <a:prstGeom prst="roundRect">
             <a:avLst>
@@ -37680,7 +37617,7 @@
         </p:nvSpPr>
         <p:spPr>
           <a:xfrm>
-            <a:off x="8356396" y="2712720"/>
+            <a:off x="8356396" y="2821178"/>
             <a:ext cx="731520" cy="731520"/>
           </a:xfrm>
           <a:prstGeom prst="ellipse">
@@ -37717,7 +37654,7 @@
         </p:blipFill>
         <p:spPr>
           <a:xfrm>
-            <a:off x="8510016" y="2866339"/>
+            <a:off x="8510016" y="2974797"/>
             <a:ext cx="424281" cy="424281"/>
           </a:xfrm>
           <a:prstGeom prst="rect">
@@ -37733,8 +37670,8 @@
         </p:nvSpPr>
         <p:spPr>
           <a:xfrm>
-            <a:off x="8292388" y="3535680"/>
-            <a:ext cx="3186074" cy="1432559"/>
+            <a:off x="8292388" y="3644138"/>
+            <a:ext cx="3186074" cy="1215644"/>
           </a:xfrm>
           <a:prstGeom prst="rect">
             <a:avLst/>
@@ -37783,49 +37720,7 @@
                 <a:ea typeface="맑은 고딕"/>
                 <a:cs typeface="맑은 고딕"/>
               </a:rPr>
-              <a:t>• 그 조치의 승인 역할이 아닌</a:t>
-            </a:r>
-          </a:p>
-          <a:p>
-            <a:pPr algn="l">
-              <a:lnSpc>
-                <a:spcPct val="110000"/>
-              </a:lnSpc>
-              <a:spcAft>
-                <a:spcPts val="400"/>
-              </a:spcAft>
-            </a:pPr>
-            <a:r>
-              <a:rPr sz="1400" b="0">
-                <a:solidFill>
-                  <a:srgbClr val="1F2A3A"/>
-                </a:solidFill>
-                <a:latin typeface="맑은 고딕"/>
-                <a:ea typeface="맑은 고딕"/>
-                <a:cs typeface="맑은 고딕"/>
-              </a:rPr>
-              <a:t>• 쪽의 승인은 거부되고</a:t>
-            </a:r>
-          </a:p>
-          <a:p>
-            <a:pPr algn="l">
-              <a:lnSpc>
-                <a:spcPct val="110000"/>
-              </a:lnSpc>
-              <a:spcAft>
-                <a:spcPts val="400"/>
-              </a:spcAft>
-            </a:pPr>
-            <a:r>
-              <a:rPr sz="1400" b="0">
-                <a:solidFill>
-                  <a:srgbClr val="1F2A3A"/>
-                </a:solidFill>
-                <a:latin typeface="맑은 고딕"/>
-                <a:ea typeface="맑은 고딕"/>
-                <a:cs typeface="맑은 고딕"/>
-              </a:rPr>
-              <a:t>• 기록으로 남는다</a:t>
+              <a:t>그 조치의 승인 역할이 아닌 쪽의 승인은 거부되고 기록으로 남는다</a:t>
             </a:r>
           </a:p>
         </p:txBody>
@@ -37838,7 +37733,7 @@
         </p:nvSpPr>
         <p:spPr>
           <a:xfrm>
-            <a:off x="8356396" y="5041392"/>
+            <a:off x="8356396" y="4932934"/>
             <a:ext cx="1371600" cy="292608"/>
           </a:xfrm>
           <a:prstGeom prst="roundRect">
@@ -37869,7 +37764,7 @@
         </p:nvSpPr>
         <p:spPr>
           <a:xfrm>
-            <a:off x="8356396" y="5041392"/>
+            <a:off x="8356396" y="4932934"/>
             <a:ext cx="1371600" cy="292608"/>
           </a:xfrm>
           <a:prstGeom prst="rect">
@@ -41856,7 +41751,7 @@
       </p:sp>
       <p:pic>
         <p:nvPicPr>
-          <p:cNvPr id="6" name="삽화:세시작.svg" descr="illust_5646356840452959193_1791743711.png"/>
+          <p:cNvPr id="6" name="삽화:세시작.svg" descr="illust_2745760447338821110_1791743711.png"/>
           <p:cNvPicPr>
             <a:picLocks noChangeAspect="1"/>
           </p:cNvPicPr>
@@ -47340,7 +47235,7 @@
       </p:sp>
       <p:pic>
         <p:nvPicPr>
-          <p:cNvPr id="6" name="삽화:운전시간.svg" descr="illust_1587195722536395227_1791743711.png"/>
+          <p:cNvPr id="6" name="삽화:운전시간.svg" descr="illust_9070112163298873459_1791743711.png"/>
           <p:cNvPicPr>
             <a:picLocks noChangeAspect="1"/>
           </p:cNvPicPr>
@@ -47851,7 +47746,7 @@
       </p:sp>
       <p:pic>
         <p:nvPicPr>
-          <p:cNvPr id="6" name="삽화:재고.svg" descr="illust_5502439894950300863_1791743711.png"/>
+          <p:cNvPr id="6" name="삽화:재고.svg" descr="illust_2565607068068227206_1791743711.png"/>
           <p:cNvPicPr>
             <a:picLocks noChangeAspect="1"/>
           </p:cNvPicPr>

--- a/docs/교재/실전반_오프라인/09회차/실전반_오프라인_09회차.pptx
+++ b/docs/교재/실전반_오프라인/09회차/실전반_오프라인_09회차.pptx
@@ -11345,7 +11345,7 @@
       </p:sp>
       <p:pic>
         <p:nvPicPr>
-          <p:cNvPr id="6" name="삽화:세흐름_나란히.svg" descr="illust_1664685223558496172_1791743711.png"/>
+          <p:cNvPr id="6" name="삽화:세흐름_나란히.svg" descr="illust_3620499563412750214_1791772944.png"/>
           <p:cNvPicPr>
             <a:picLocks noChangeAspect="1"/>
           </p:cNvPicPr>
@@ -12831,7 +12831,7 @@
       </p:sp>
       <p:pic>
         <p:nvPicPr>
-          <p:cNvPr id="6" name="삽화:승인블록_자리.svg" descr="illust_4728906466311683213_1791743711.png"/>
+          <p:cNvPr id="6" name="삽화:승인블록_자리.svg" descr="illust_1766775398328242805_1791772944.png"/>
           <p:cNvPicPr>
             <a:picLocks noChangeAspect="1"/>
           </p:cNvPicPr>
@@ -13762,7 +13762,7 @@
       </p:sp>
       <p:pic>
         <p:nvPicPr>
-          <p:cNvPr id="6" name="삽화:흐름_정기점검.svg" descr="illust_1148023554448725225_1791743711.png"/>
+          <p:cNvPr id="6" name="삽화:흐름_정기점검.svg" descr="illust_8211419731772363076_1791772944.png"/>
           <p:cNvPicPr>
             <a:picLocks noChangeAspect="1"/>
           </p:cNvPicPr>
@@ -14651,7 +14651,7 @@
       </p:sp>
       <p:pic>
         <p:nvPicPr>
-          <p:cNvPr id="6" name="삽화:흐름_재고보충.svg" descr="illust_924864470419963438_1791743711.png"/>
+          <p:cNvPr id="6" name="삽화:흐름_재고보충.svg" descr="illust_4550802412051088374_1791772944.png"/>
           <p:cNvPicPr>
             <a:picLocks noChangeAspect="1"/>
           </p:cNvPicPr>
@@ -25949,7 +25949,7 @@
       </p:sp>
       <p:pic>
         <p:nvPicPr>
-          <p:cNvPr id="6" name="삽화:요소_복습.svg" descr="illust_7870393730501215818_1791743711.png"/>
+          <p:cNvPr id="6" name="삽화:요소_복습.svg" descr="illust_2838220059259967058_1791772944.png"/>
           <p:cNvPicPr>
             <a:picLocks noChangeAspect="1"/>
           </p:cNvPicPr>
@@ -26775,7 +26775,7 @@
       </p:sp>
       <p:pic>
         <p:nvPicPr>
-          <p:cNvPr id="6" name="삽화:다섯자리.svg" descr="illust_7399889882983233568_1791743711.png"/>
+          <p:cNvPr id="6" name="삽화:다섯자리.svg" descr="illust_1516116853111409440_1791772944.png"/>
           <p:cNvPicPr>
             <a:picLocks noChangeAspect="1"/>
           </p:cNvPicPr>
@@ -27370,7 +27370,7 @@
       </p:sp>
       <p:pic>
         <p:nvPicPr>
-          <p:cNvPr id="6" name="삽화:주고받는것.svg" descr="illust_1268451587463532828_1791743711.png"/>
+          <p:cNvPr id="6" name="삽화:주고받는것.svg" descr="illust_6480850597558375765_1791772944.png"/>
           <p:cNvPicPr>
             <a:picLocks noChangeAspect="1"/>
           </p:cNvPicPr>
@@ -29292,7 +29292,7 @@
       </p:sp>
       <p:pic>
         <p:nvPicPr>
-          <p:cNvPr id="6" name="삽화:세종료.svg" descr="illust_6773597621159696462_1791743711.png"/>
+          <p:cNvPr id="6" name="삽화:세종료.svg" descr="illust_7988607230378243405_1791772944.png"/>
           <p:cNvPicPr>
             <a:picLocks noChangeAspect="1"/>
           </p:cNvPicPr>
@@ -30632,7 +30632,7 @@
       </p:sp>
       <p:pic>
         <p:nvPicPr>
-          <p:cNvPr id="6" name="삽화:세층연결.svg" descr="illust_7150920625305678661_1791743711.png"/>
+          <p:cNvPr id="6" name="삽화:세층연결.svg" descr="illust_7698440032944220762_1791772944.png"/>
           <p:cNvPicPr>
             <a:picLocks noChangeAspect="1"/>
           </p:cNvPicPr>
@@ -35120,7 +35120,7 @@
       </p:sp>
       <p:pic>
         <p:nvPicPr>
-          <p:cNvPr id="6" name="삽화:장치자리.svg" descr="illust_250203644703426949_1791770880.png"/>
+          <p:cNvPr id="6" name="삽화:장치자리.svg" descr="illust_4929028840743459855_1791770880.png"/>
           <p:cNvPicPr>
             <a:picLocks noChangeAspect="1"/>
           </p:cNvPicPr>
@@ -42212,7 +42212,7 @@
       </p:sp>
       <p:pic>
         <p:nvPicPr>
-          <p:cNvPr id="6" name="삽화:세시작.svg" descr="illust_2930065245225658438_1791743711.png"/>
+          <p:cNvPr id="6" name="삽화:세시작.svg" descr="illust_648010065885612571_1791772944.png"/>
           <p:cNvPicPr>
             <a:picLocks noChangeAspect="1"/>
           </p:cNvPicPr>
@@ -42716,7 +42716,7 @@
                 <a:ea typeface="맑은 고딕"/>
                 <a:cs typeface="맑은 고딕"/>
               </a:rPr>
-              <a:t>배운 내용을 바탕으로 정답을 맞춰보세요.</a:t>
+              <a:t>배운 내용을 바탕으로 정답을 맞혀 보세요.</a:t>
             </a:r>
           </a:p>
         </p:txBody>
@@ -47696,7 +47696,7 @@
       </p:sp>
       <p:pic>
         <p:nvPicPr>
-          <p:cNvPr id="6" name="삽화:운전시간.svg" descr="illust_3654939607735641159_1791743711.png"/>
+          <p:cNvPr id="6" name="삽화:운전시간.svg" descr="illust_5274713928816789842_1791772944.png"/>
           <p:cNvPicPr>
             <a:picLocks noChangeAspect="1"/>
           </p:cNvPicPr>
@@ -48207,7 +48207,7 @@
       </p:sp>
       <p:pic>
         <p:nvPicPr>
-          <p:cNvPr id="6" name="삽화:재고.svg" descr="illust_6391132412395702864_1791743711.png"/>
+          <p:cNvPr id="6" name="삽화:재고.svg" descr="illust_8787952468935062204_1791772944.png"/>
           <p:cNvPicPr>
             <a:picLocks noChangeAspect="1"/>
           </p:cNvPicPr>

--- a/docs/교재/실전반_오프라인/09회차/실전반_오프라인_09회차.pptx
+++ b/docs/교재/실전반_오프라인/09회차/실전반_오프라인_09회차.pptx
@@ -905,7 +905,7 @@
           <a:lstStyle/>
           <a:p>
             <a:r>
-              <a:t>승인 블록을 다시 써서 그린 정기 점검 프로세스입니다. 하늘색 요소는 긴급 대응 프로세스의 승인 블록과 같고, 승인 역할만 설비보전팀장으로 바뀌었습니다. 새로 그린 것은 흰 요소 넷입니다. 정기 점검 요청이라는 시작 이벤트, 에이전트의 정비 계획 제안, 그리고 승인 뒤의 정비 오더 등록 · 공지 메일과 결과 보고입니다. 작업은 여섯, 게이트웨이는 하나, 끝 이벤트는 셋입니다.</a:t>
+              <a:t>정기 점검 프로세스의 전체 그림입니다. 하늘색 요소는 긴급 대응 프로세스의 승인 블록과 같고, 승인 역할만 설비보전팀장으로 바뀌었습니다. 이 프로세스에서 달라진 것은 흰 요소 넷입니다. 정기 점검 요청이라는 시작 이벤트, 에이전트의 정비 계획 제안, 그리고 승인 뒤의 정비 오더 등록 · 공지 메일과 결과 보고입니다. 작업은 여섯, 게이트웨이는 하나, 끝 이벤트는 셋입니다.</a:t>
             </a:r>
           </a:p>
         </p:txBody>
@@ -975,7 +975,7 @@
           <a:lstStyle/>
           <a:p>
             <a:r>
-              <a:t>재고 보충 프로세스도 같은 방법으로 그립니다. 하늘색 승인 블록은 그대로이고 승인 역할이 구매 담당입니다. 승인 뒤에는 ERP 발주 · 공급사 메일, 입고 · 재고 반영, 결과 보고의 세 작업이 이어집니다. 정기 점검보다 시스템 작업이 하나 많아 작업은 일곱입니다. 두 그림을 견주면 승인 블록의 오른쪽에 무엇을 잇느냐만 다릅니다.</a:t>
+              <a:t>재고 보충 프로세스도 같은 구조입니다. 하늘색 승인 블록은 그대로이고 승인 역할이 구매 담당입니다. 승인 뒤에는 ERP 발주 · 공급사 메일, 입고 · 재고 반영, 결과 보고의 세 작업이 이어집니다. 정기 점검보다 시스템 작업이 하나 많아 작업은 일곱입니다. 두 그림을 견주면 승인 블록의 오른쪽에 이어지는 작업만 다릅니다.</a:t>
             </a:r>
           </a:p>
         </p:txBody>
@@ -11345,7 +11345,7 @@
       </p:sp>
       <p:pic>
         <p:nvPicPr>
-          <p:cNvPr id="6" name="삽화:세흐름_나란히.svg" descr="illust_3620499563412750214_1791772944.png"/>
+          <p:cNvPr id="6" name="삽화:세흐름_나란히.svg" descr="illust_8707148658487319820_1791772944.png"/>
           <p:cNvPicPr>
             <a:picLocks noChangeAspect="1"/>
           </p:cNvPicPr>
@@ -12831,7 +12831,7 @@
       </p:sp>
       <p:pic>
         <p:nvPicPr>
-          <p:cNvPr id="6" name="삽화:승인블록_자리.svg" descr="illust_1766775398328242805_1791772944.png"/>
+          <p:cNvPr id="6" name="삽화:승인블록_자리.svg" descr="illust_7770822306993630882_1791772944.png"/>
           <p:cNvPicPr>
             <a:picLocks noChangeAspect="1"/>
           </p:cNvPicPr>
@@ -13687,7 +13687,7 @@
                 <a:ea typeface="맑은 고딕"/>
                 <a:cs typeface="맑은 고딕"/>
               </a:rPr>
-              <a:t>정기 점검 프로세스는 승인 블록을 그대로 쓰고, 시작 이벤트와 제안 작업과 승인 뒤의 작업 둘만 새로 그린 것이다.</a:t>
+              <a:t>정기 점검 프로세스는 승인 블록이 긴급 대응과 같고, 시작 이벤트와 제안 작업과 승인 뒤의 작업 둘만 다르다.</a:t>
             </a:r>
           </a:p>
         </p:txBody>
@@ -13762,7 +13762,7 @@
       </p:sp>
       <p:pic>
         <p:nvPicPr>
-          <p:cNvPr id="6" name="삽화:흐름_정기점검.svg" descr="illust_8211419731772363076_1791772944.png"/>
+          <p:cNvPr id="6" name="삽화:흐름_정기점검.svg" descr="illust_5952324706390780929_1791772944.png"/>
           <p:cNvPicPr>
             <a:picLocks noChangeAspect="1"/>
           </p:cNvPicPr>
@@ -14451,7 +14451,7 @@
                 <a:ea typeface="맑은 고딕"/>
                 <a:cs typeface="맑은 고딕"/>
               </a:rPr>
-              <a:t>새로 그린 것</a:t>
+              <a:t>이 프로세스에서 달라진 요소</a:t>
             </a:r>
           </a:p>
           <a:p>
@@ -14576,7 +14576,7 @@
                 <a:ea typeface="맑은 고딕"/>
                 <a:cs typeface="맑은 고딕"/>
               </a:rPr>
-              <a:t>재고 보충 프로세스도 같은 승인 블록 뒤에 발주, 입고와 재고 반영, 결과 보고의 세 작업을 이어 작업 일곱으로 완성된다.</a:t>
+              <a:t>재고 보충 프로세스도 승인 블록은 같고, 그 뒤에 발주, 입고와 재고 반영, 결과 보고의 세 작업이 이어져 작업이 일곱이다.</a:t>
             </a:r>
           </a:p>
         </p:txBody>
@@ -14651,7 +14651,7 @@
       </p:sp>
       <p:pic>
         <p:nvPicPr>
-          <p:cNvPr id="6" name="삽화:흐름_재고보충.svg" descr="illust_4550802412051088374_1791772944.png"/>
+          <p:cNvPr id="6" name="삽화:흐름_재고보충.svg" descr="illust_1653685016394039863_1791772944.png"/>
           <p:cNvPicPr>
             <a:picLocks noChangeAspect="1"/>
           </p:cNvPicPr>
@@ -25949,7 +25949,7 @@
       </p:sp>
       <p:pic>
         <p:nvPicPr>
-          <p:cNvPr id="6" name="삽화:요소_복습.svg" descr="illust_2838220059259967058_1791772944.png"/>
+          <p:cNvPr id="6" name="삽화:요소_복습.svg" descr="illust_324223970078891295_1791772944.png"/>
           <p:cNvPicPr>
             <a:picLocks noChangeAspect="1"/>
           </p:cNvPicPr>
@@ -26775,7 +26775,7 @@
       </p:sp>
       <p:pic>
         <p:nvPicPr>
-          <p:cNvPr id="6" name="삽화:다섯자리.svg" descr="illust_1516116853111409440_1791772944.png"/>
+          <p:cNvPr id="6" name="삽화:다섯자리.svg" descr="illust_8295198270089266307_1791772944.png"/>
           <p:cNvPicPr>
             <a:picLocks noChangeAspect="1"/>
           </p:cNvPicPr>
@@ -27370,7 +27370,7 @@
       </p:sp>
       <p:pic>
         <p:nvPicPr>
-          <p:cNvPr id="6" name="삽화:주고받는것.svg" descr="illust_6480850597558375765_1791772944.png"/>
+          <p:cNvPr id="6" name="삽화:주고받는것.svg" descr="illust_8566218519050203089_1791772944.png"/>
           <p:cNvPicPr>
             <a:picLocks noChangeAspect="1"/>
           </p:cNvPicPr>
@@ -29292,7 +29292,7 @@
       </p:sp>
       <p:pic>
         <p:nvPicPr>
-          <p:cNvPr id="6" name="삽화:세종료.svg" descr="illust_7988607230378243405_1791772944.png"/>
+          <p:cNvPr id="6" name="삽화:세종료.svg" descr="illust_2855116956523087385_1791772944.png"/>
           <p:cNvPicPr>
             <a:picLocks noChangeAspect="1"/>
           </p:cNvPicPr>
@@ -30632,7 +30632,7 @@
       </p:sp>
       <p:pic>
         <p:nvPicPr>
-          <p:cNvPr id="6" name="삽화:세층연결.svg" descr="illust_7698440032944220762_1791772944.png"/>
+          <p:cNvPr id="6" name="삽화:세층연결.svg" descr="illust_6632386346555759538_1791772944.png"/>
           <p:cNvPicPr>
             <a:picLocks noChangeAspect="1"/>
           </p:cNvPicPr>
@@ -35120,7 +35120,7 @@
       </p:sp>
       <p:pic>
         <p:nvPicPr>
-          <p:cNvPr id="6" name="삽화:장치자리.svg" descr="illust_4929028840743459855_1791770880.png"/>
+          <p:cNvPr id="6" name="삽화:장치자리.svg" descr="illust_6045904177462364347_1791770880.png"/>
           <p:cNvPicPr>
             <a:picLocks noChangeAspect="1"/>
           </p:cNvPicPr>
@@ -42212,7 +42212,7 @@
       </p:sp>
       <p:pic>
         <p:nvPicPr>
-          <p:cNvPr id="6" name="삽화:세시작.svg" descr="illust_648010065885612571_1791772944.png"/>
+          <p:cNvPr id="6" name="삽화:세시작.svg" descr="illust_6008907137311562590_1791772944.png"/>
           <p:cNvPicPr>
             <a:picLocks noChangeAspect="1"/>
           </p:cNvPicPr>
@@ -47696,7 +47696,7 @@
       </p:sp>
       <p:pic>
         <p:nvPicPr>
-          <p:cNvPr id="6" name="삽화:운전시간.svg" descr="illust_5274713928816789842_1791772944.png"/>
+          <p:cNvPr id="6" name="삽화:운전시간.svg" descr="illust_1758690681497778914_1791772944.png"/>
           <p:cNvPicPr>
             <a:picLocks noChangeAspect="1"/>
           </p:cNvPicPr>
@@ -48207,7 +48207,7 @@
       </p:sp>
       <p:pic>
         <p:nvPicPr>
-          <p:cNvPr id="6" name="삽화:재고.svg" descr="illust_8787952468935062204_1791772944.png"/>
+          <p:cNvPr id="6" name="삽화:재고.svg" descr="illust_9047331537556084498_1791772944.png"/>
           <p:cNvPicPr>
             <a:picLocks noChangeAspect="1"/>
           </p:cNvPicPr>
